--- a/content/decks/media-studies/media-studies-s1-lesson-01-the-four-key-concepts.pptx
+++ b/content/decks/media-studies/media-studies-s1-lesson-01-the-four-key-concepts.pptx
@@ -1129,7 +1129,7 @@
           <a:p>
             <a:r>
               <a:rPr lang="en-US" dirty="0"/>
-              <a:t/>
+              <a:t>Name them explicitly as the four Key Concepts and have the room say all four aloud before the definitions are read. Board anchors go up now and stay up all semester.</a:t>
             </a:r>
             <a:endParaRPr lang="en-US" dirty="0"/>
           </a:p>
@@ -1217,7 +1217,7 @@
           <a:p>
             <a:r>
               <a:rPr lang="en-US" dirty="0"/>
-              <a:t>Selection is the quietest mediation: the six-exposure contact sheet and the retouched thumb are widely documented. Tell it as a story, not a footnote.</a:t>
+              <a:t>The six-exposure contact sheet and the retouched thumb are documented. Tell it as a story. Selection is the mediation students never think to look for.</a:t>
             </a:r>
             <a:endParaRPr lang="en-US" dirty="0"/>
           </a:p>
@@ -2547,7 +2547,7 @@
                 <a:ea typeface="Georgia" pitchFamily="34" charset="-122"/>
                 <a:cs typeface="Georgia" pitchFamily="34" charset="-120"/>
               </a:rPr>
-              <a:t>The four Key Concepts, then a version not a window proven three times: staging, selection, anchorage.</a:t>
+              <a:t>The four Key Concepts named and applied, a version not a window proven three times; Sort Wars closes the double.</a:t>
             </a:r>
             <a:endParaRPr lang="en-US" sz="1600" dirty="0"/>
           </a:p>
@@ -2690,7 +2690,7 @@
                 <a:ea typeface="Georgia" pitchFamily="34" charset="-122"/>
                 <a:cs typeface="Georgia" pitchFamily="34" charset="-120"/>
               </a:rPr>
-              <a:t>Denotation only: describe an unseen image with every meaning held back. CS1 is written and collected.</a:t>
+              <a:t>Denotation only: every meaning held back. CS1 is written, then faces the Smuggler Hunt.</a:t>
             </a:r>
             <a:endParaRPr lang="en-US" sz="1600" dirty="0"/>
           </a:p>
@@ -3028,7 +3028,7 @@
                 <a:ea typeface="Georgia" pitchFamily="34" charset="-122"/>
                 <a:cs typeface="Georgia" pitchFamily="34" charset="-120"/>
               </a:rPr>
-              <a:t>One paragraph on an unseen image, pure denotation: what is there, not what it means. Worried, poor, desperate go on a parked list that L02 will collect. A paragraph with zero interpretive claims, one that survives a peer hunt, is the win.</a:t>
+              <a:t>One paragraph on an unseen image, pure denotation: what is there, not what it means. Worried, poor, desperate go on a parked list that L02 will collect. A paragraph with zero interpretive claims, one that survives the Smuggler Hunt, is the win.</a:t>
             </a:r>
             <a:endParaRPr lang="en-US" sz="2100" dirty="0"/>
           </a:p>
@@ -3214,8 +3214,8 @@
         </p:nvSpPr>
         <p:spPr>
           <a:xfrm>
-            <a:off x="822960" y="2148840"/>
-            <a:ext cx="5486400" cy="274320"/>
+            <a:off x="822960" y="1188720"/>
+            <a:ext cx="10424160" cy="365760"/>
           </a:xfrm>
           <a:prstGeom prst="rect">
             <a:avLst/>
@@ -3227,18 +3227,57 @@
           <a:bodyPr wrap="square" lIns="0" tIns="0" rIns="0" bIns="0" rtlCol="0" anchor="ctr"/>
           <a:lstStyle/>
           <a:p>
-            <a:pPr algn="l" indent="0" marL="0">
-              <a:buNone/>
-            </a:pPr>
-            <a:r>
-              <a:rPr lang="en-US" sz="1100" b="1" spc="250" kern="0" dirty="0">
-                <a:solidFill>
-                  <a:srgbClr val="FAF8F1"/>
+            <a:pPr indent="0" marL="0">
+              <a:buNone/>
+            </a:pPr>
+            <a:r>
+              <a:rPr lang="en-US" sz="1300" spc="100" kern="0" dirty="0">
+                <a:solidFill>
+                  <a:srgbClr val="E8EFE7"/>
                 </a:solidFill>
                 <a:latin typeface="Arial" pitchFamily="34" charset="0"/>
                 <a:ea typeface="Arial" pitchFamily="34" charset="-122"/>
                 <a:cs typeface="Arial" pitchFamily="34" charset="-120"/>
               </a:rPr>
+              <a:t>Language · Representation · Industry · Audience: the four Key Concepts, now yours.</a:t>
+            </a:r>
+            <a:endParaRPr lang="en-US" sz="1300" dirty="0"/>
+          </a:p>
+        </p:txBody>
+      </p:sp>
+      <p:sp>
+        <p:nvSpPr>
+          <p:cNvPr id="3" name="Text 1"/>
+          <p:cNvSpPr/>
+          <p:nvPr/>
+        </p:nvSpPr>
+        <p:spPr>
+          <a:xfrm>
+            <a:off x="822960" y="2148840"/>
+            <a:ext cx="5486400" cy="274320"/>
+          </a:xfrm>
+          <a:prstGeom prst="rect">
+            <a:avLst/>
+          </a:prstGeom>
+          <a:noFill/>
+          <a:ln/>
+        </p:spPr>
+        <p:txBody>
+          <a:bodyPr wrap="square" lIns="0" tIns="0" rIns="0" bIns="0" rtlCol="0" anchor="ctr"/>
+          <a:lstStyle/>
+          <a:p>
+            <a:pPr algn="l" indent="0" marL="0">
+              <a:buNone/>
+            </a:pPr>
+            <a:r>
+              <a:rPr lang="en-US" sz="1100" b="1" spc="250" kern="0" dirty="0">
+                <a:solidFill>
+                  <a:srgbClr val="FAF8F1"/>
+                </a:solidFill>
+                <a:latin typeface="Arial" pitchFamily="34" charset="0"/>
+                <a:ea typeface="Arial" pitchFamily="34" charset="-122"/>
+                <a:cs typeface="Arial" pitchFamily="34" charset="-120"/>
+              </a:rPr>
               <a:t>NEXT</a:t>
             </a:r>
             <a:endParaRPr lang="en-US" sz="1100" dirty="0"/>
@@ -3247,7 +3286,7 @@
       </p:sp>
       <p:sp>
         <p:nvSpPr>
-          <p:cNvPr id="3" name="Shape 1"/>
+          <p:cNvPr id="4" name="Shape 2"/>
           <p:cNvSpPr/>
           <p:nvPr/>
         </p:nvSpPr>
@@ -3270,7 +3309,7 @@
       </p:sp>
       <p:sp>
         <p:nvSpPr>
-          <p:cNvPr id="4" name="Text 2"/>
+          <p:cNvPr id="5" name="Text 3"/>
           <p:cNvSpPr/>
           <p:nvPr/>
         </p:nvSpPr>
@@ -3332,7 +3371,7 @@
       </p:sp>
       <p:sp>
         <p:nvSpPr>
-          <p:cNvPr id="5" name="Text 3"/>
+          <p:cNvPr id="6" name="Text 4"/>
           <p:cNvSpPr/>
           <p:nvPr/>
         </p:nvSpPr>
@@ -3371,7 +3410,7 @@
       </p:sp>
       <p:sp>
         <p:nvSpPr>
-          <p:cNvPr id="6" name="Shape 4"/>
+          <p:cNvPr id="7" name="Shape 5"/>
           <p:cNvSpPr/>
           <p:nvPr/>
         </p:nvSpPr>
@@ -3394,7 +3433,7 @@
       </p:sp>
       <p:sp>
         <p:nvSpPr>
-          <p:cNvPr id="7" name="Text 5"/>
+          <p:cNvPr id="8" name="Text 6"/>
           <p:cNvSpPr/>
           <p:nvPr/>
         </p:nvSpPr>
@@ -3433,7 +3472,7 @@
       </p:sp>
       <p:sp>
         <p:nvSpPr>
-          <p:cNvPr id="8" name="Text 6"/>
+          <p:cNvPr id="9" name="Text 7"/>
           <p:cNvSpPr/>
           <p:nvPr/>
         </p:nvSpPr>
@@ -3692,7 +3731,7 @@
       </p:grpSpPr>
       <p:pic>
         <p:nvPicPr>
-          <p:cNvPr id="2" name="Image 0" descr="/private/tmp/claude-501/-Users-dogan-Documents-Vaults-Courses/a3a5132d-721f-4cd4-8ddd-e62e2b37b51b/scratchpad/img/crops/gardner-sharpshooter_a1777.jpg">    </p:cNvPr>
+          <p:cNvPr id="2" name="Image 0" descr="/Users/dogan/Documents/Vaults/Courses/wiki/classes/media-studies/decks/_build/img/crops/gardner-sharpshooter_a1777.jpg">    </p:cNvPr>
           <p:cNvPicPr>
             <a:picLocks noChangeAspect="1"/>
           </p:cNvPicPr>
@@ -4137,7 +4176,7 @@
                 <a:ea typeface="Arial" pitchFamily="34" charset="-122"/>
                 <a:cs typeface="Arial" pitchFamily="34" charset="-120"/>
               </a:rPr>
-              <a:t>THE METHOD · FOUR LENSES</a:t>
+              <a:t>THE FOUR KEY CONCEPTS</a:t>
             </a:r>
             <a:endParaRPr lang="en-US" sz="1100" dirty="0"/>
           </a:p>
@@ -4214,7 +4253,7 @@
         <p:spPr>
           <a:xfrm>
             <a:off x="822960" y="932688"/>
-            <a:ext cx="10543032" cy="640080"/>
+            <a:ext cx="10543032" cy="548640"/>
           </a:xfrm>
           <a:prstGeom prst="rect">
             <a:avLst/>
@@ -4230,7 +4269,7 @@
               <a:buNone/>
             </a:pPr>
             <a:r>
-              <a:rPr lang="en-US" sz="3200" dirty="0">
+              <a:rPr lang="en-US" sz="2800" dirty="0">
                 <a:solidFill>
                   <a:srgbClr val="24313F"/>
                 </a:solidFill>
@@ -4238,15 +4277,54 @@
                 <a:ea typeface="Georgia" pitchFamily="34" charset="-122"/>
                 <a:cs typeface="Georgia" pitchFamily="34" charset="-120"/>
               </a:rPr>
-              <a:t>Four tools, not four words</a:t>
-            </a:r>
-            <a:endParaRPr lang="en-US" sz="3200" dirty="0"/>
+              <a:t>Language · Representation · Industry · Audience</a:t>
+            </a:r>
+            <a:endParaRPr lang="en-US" sz="2800" dirty="0"/>
           </a:p>
         </p:txBody>
       </p:sp>
       <p:sp>
         <p:nvSpPr>
           <p:cNvPr id="6" name="Text 4"/>
+          <p:cNvSpPr/>
+          <p:nvPr/>
+        </p:nvSpPr>
+        <p:spPr>
+          <a:xfrm>
+            <a:off x="822960" y="1499616"/>
+            <a:ext cx="10543032" cy="365760"/>
+          </a:xfrm>
+          <a:prstGeom prst="rect">
+            <a:avLst/>
+          </a:prstGeom>
+          <a:noFill/>
+          <a:ln/>
+        </p:spPr>
+        <p:txBody>
+          <a:bodyPr wrap="square" lIns="0" tIns="0" rIns="0" bIns="0" rtlCol="0" anchor="ctr"/>
+          <a:lstStyle/>
+          <a:p>
+            <a:pPr indent="0" marL="0">
+              <a:buNone/>
+            </a:pPr>
+            <a:r>
+              <a:rPr lang="en-US" sz="1250" i="1" dirty="0">
+                <a:solidFill>
+                  <a:srgbClr val="7A7F72"/>
+                </a:solidFill>
+                <a:latin typeface="Arial" pitchFamily="34" charset="0"/>
+                <a:ea typeface="Arial" pitchFamily="34" charset="-122"/>
+                <a:cs typeface="Arial" pitchFamily="34" charset="-120"/>
+              </a:rPr>
+              <a:t>Cambridge reads every media text through these four Key Concepts. So does this course, for two years. Four tools, not four words.</a:t>
+            </a:r>
+            <a:endParaRPr lang="en-US" sz="1250" dirty="0"/>
+          </a:p>
+        </p:txBody>
+      </p:sp>
+      <p:sp>
+        <p:nvSpPr>
+          <p:cNvPr id="7" name="Text 5"/>
           <p:cNvSpPr/>
           <p:nvPr/>
         </p:nvSpPr>
@@ -4285,7 +4363,7 @@
       </p:sp>
       <p:sp>
         <p:nvSpPr>
-          <p:cNvPr id="7" name="Text 5"/>
+          <p:cNvPr id="8" name="Text 6"/>
           <p:cNvSpPr/>
           <p:nvPr/>
         </p:nvSpPr>
@@ -4324,7 +4402,7 @@
       </p:sp>
       <p:sp>
         <p:nvSpPr>
-          <p:cNvPr id="8" name="Text 6"/>
+          <p:cNvPr id="9" name="Text 7"/>
           <p:cNvSpPr/>
           <p:nvPr/>
         </p:nvSpPr>
@@ -4366,7 +4444,7 @@
       </p:sp>
       <p:sp>
         <p:nvSpPr>
-          <p:cNvPr id="9" name="Text 7"/>
+          <p:cNvPr id="10" name="Text 8"/>
           <p:cNvSpPr/>
           <p:nvPr/>
         </p:nvSpPr>
@@ -4405,7 +4483,7 @@
       </p:sp>
       <p:sp>
         <p:nvSpPr>
-          <p:cNvPr id="10" name="Text 8"/>
+          <p:cNvPr id="11" name="Text 9"/>
           <p:cNvSpPr/>
           <p:nvPr/>
         </p:nvSpPr>
@@ -4444,7 +4522,7 @@
       </p:sp>
       <p:sp>
         <p:nvSpPr>
-          <p:cNvPr id="11" name="Text 9"/>
+          <p:cNvPr id="12" name="Text 10"/>
           <p:cNvSpPr/>
           <p:nvPr/>
         </p:nvSpPr>
@@ -4486,7 +4564,7 @@
       </p:sp>
       <p:sp>
         <p:nvSpPr>
-          <p:cNvPr id="12" name="Text 10"/>
+          <p:cNvPr id="13" name="Text 11"/>
           <p:cNvSpPr/>
           <p:nvPr/>
         </p:nvSpPr>
@@ -4525,7 +4603,7 @@
       </p:sp>
       <p:sp>
         <p:nvSpPr>
-          <p:cNvPr id="13" name="Text 11"/>
+          <p:cNvPr id="14" name="Text 12"/>
           <p:cNvSpPr/>
           <p:nvPr/>
         </p:nvSpPr>
@@ -4564,7 +4642,7 @@
       </p:sp>
       <p:sp>
         <p:nvSpPr>
-          <p:cNvPr id="14" name="Text 12"/>
+          <p:cNvPr id="15" name="Text 13"/>
           <p:cNvSpPr/>
           <p:nvPr/>
         </p:nvSpPr>
@@ -4606,7 +4684,7 @@
       </p:sp>
       <p:sp>
         <p:nvSpPr>
-          <p:cNvPr id="15" name="Text 13"/>
+          <p:cNvPr id="16" name="Text 14"/>
           <p:cNvSpPr/>
           <p:nvPr/>
         </p:nvSpPr>
@@ -4645,7 +4723,7 @@
       </p:sp>
       <p:sp>
         <p:nvSpPr>
-          <p:cNvPr id="16" name="Text 14"/>
+          <p:cNvPr id="17" name="Text 15"/>
           <p:cNvSpPr/>
           <p:nvPr/>
         </p:nvSpPr>
@@ -4684,7 +4762,7 @@
       </p:sp>
       <p:sp>
         <p:nvSpPr>
-          <p:cNvPr id="17" name="Text 15"/>
+          <p:cNvPr id="18" name="Text 16"/>
           <p:cNvSpPr/>
           <p:nvPr/>
         </p:nvSpPr>
@@ -4726,7 +4804,7 @@
       </p:sp>
       <p:sp>
         <p:nvSpPr>
-          <p:cNvPr id="18" name="Shape 16"/>
+          <p:cNvPr id="19" name="Shape 17"/>
           <p:cNvSpPr/>
           <p:nvPr/>
         </p:nvSpPr>
@@ -4749,7 +4827,7 @@
       </p:sp>
       <p:sp>
         <p:nvSpPr>
-          <p:cNvPr id="19" name="Text 17"/>
+          <p:cNvPr id="20" name="Text 18"/>
           <p:cNvSpPr/>
           <p:nvPr/>
         </p:nvSpPr>
@@ -4788,7 +4866,7 @@
       </p:sp>
       <p:sp>
         <p:nvSpPr>
-          <p:cNvPr id="20" name="Text 18"/>
+          <p:cNvPr id="21" name="Text 19"/>
           <p:cNvSpPr/>
           <p:nvPr/>
         </p:nvSpPr>
@@ -4859,7 +4937,7 @@
       </p:grpSpPr>
       <p:pic>
         <p:nvPicPr>
-          <p:cNvPr id="2" name="Image 0" descr="/private/tmp/claude-501/-Users-dogan-Documents-Vaults-Courses/a3a5132d-721f-4cd4-8ddd-e62e2b37b51b/scratchpad/img/crops/migrant-mother_a691.jpg">    </p:cNvPr>
+          <p:cNvPr id="2" name="Image 0" descr="/Users/dogan/Documents/Vaults/Courses/wiki/classes/media-studies/decks/_build/img/crops/migrant-mother_a691.jpg">    </p:cNvPr>
           <p:cNvPicPr>
             <a:picLocks noChangeAspect="1"/>
           </p:cNvPicPr>
@@ -5817,7 +5895,7 @@
       </p:grpSpPr>
       <p:pic>
         <p:nvPicPr>
-          <p:cNvPr id="2" name="Image 0" descr="/private/tmp/claude-501/-Users-dogan-Documents-Vaults-Courses/a3a5132d-721f-4cd4-8ddd-e62e2b37b51b/scratchpad/img/crops/underwood-sweetheart_a1777.jpg">    </p:cNvPr>
+          <p:cNvPr id="2" name="Image 0" descr="/Users/dogan/Documents/Vaults/Courses/wiki/classes/media-studies/decks/_build/img/crops/underwood-sweetheart_a1777.jpg">    </p:cNvPr>
           <p:cNvPicPr>
             <a:picLocks noChangeAspect="1"/>
           </p:cNvPicPr>

--- a/content/decks/media-studies/media-studies-s1-lesson-01-the-four-key-concepts.pptx
+++ b/content/decks/media-studies/media-studies-s1-lesson-01-the-four-key-concepts.pptx
@@ -2050,7 +2050,7 @@
                 <a:ea typeface="Georgia" pitchFamily="34" charset="-122"/>
                 <a:cs typeface="Georgia" pitchFamily="34" charset="-120"/>
               </a:rPr>
-              <a:t>Introduction to Media · Lesson 01 of 16</a:t>
+              <a:t>Introduction to Media · Lesson 01 of 19</a:t>
             </a:r>
             <a:endParaRPr lang="en-US" sz="2200" dirty="0"/>
           </a:p>

--- a/content/decks/media-studies/media-studies-s1-lesson-01-the-four-key-concepts.pptx
+++ b/content/decks/media-studies/media-studies-s1-lesson-01-the-four-key-concepts.pptx
@@ -3343,7 +3343,7 @@
                 <a:ea typeface="Georgia" pitchFamily="34" charset="-122"/>
                 <a:cs typeface="Georgia" pitchFamily="34" charset="-120"/>
               </a:rPr>
-              <a:t>Semiotics:</a:t>
+              <a:t>Semiotics,</a:t>
             </a:r>
             <a:endParaRPr lang="en-US" sz="5400" dirty="0"/>
           </a:p>
@@ -3363,7 +3363,7 @@
                 <a:ea typeface="Georgia" pitchFamily="34" charset="-122"/>
                 <a:cs typeface="Georgia" pitchFamily="34" charset="-120"/>
               </a:rPr>
-              <a:t>How Images Mean</a:t>
+              <a:t>Signs and Codes</a:t>
             </a:r>
             <a:endParaRPr lang="en-US" sz="5400" dirty="0"/>
           </a:p>
